--- a/session1/exam-strategy/q2/q2_exam_strategy.pptx
+++ b/session1/exam-strategy/q2/q2_exam_strategy.pptx
@@ -3187,8 +3187,8 @@
         </p:nvSpPr>
         <p:spPr>
           <a:xfrm>
-            <a:off x="274320" y="685800"/>
-            <a:ext cx="6400800" cy="1645920"/>
+            <a:off x="274320" y="640080"/>
+            <a:ext cx="6583680" cy="1280160"/>
           </a:xfrm>
           <a:prstGeom prst="rect">
             <a:avLst/>
@@ -3196,13 +3196,13 @@
           <a:noFill/>
         </p:spPr>
         <p:txBody>
-          <a:bodyPr wrap="square">
+          <a:bodyPr wrap="square" tIns="0" bIns="0">
             <a:spAutoFit/>
           </a:bodyPr>
           <a:lstStyle/>
           <a:p>
             <a:pPr>
-              <a:defRPr sz="1100">
+              <a:defRPr sz="900">
                 <a:solidFill>
                   <a:srgbClr val="FFFFFF"/>
                 </a:solidFill>
@@ -3223,8 +3223,8 @@
         </p:nvSpPr>
         <p:spPr>
           <a:xfrm>
-            <a:off x="365760" y="2377440"/>
-            <a:ext cx="274320" cy="274320"/>
+            <a:off x="274320" y="2057400"/>
+            <a:ext cx="201168" cy="201168"/>
           </a:xfrm>
           <a:prstGeom prst="ellipse">
             <a:avLst/>
@@ -3255,7 +3255,7 @@
           <a:lstStyle/>
           <a:p>
             <a:pPr algn="ctr">
-              <a:defRPr sz="900" b="1">
+              <a:defRPr sz="700" b="1">
                 <a:solidFill>
                   <a:srgbClr val="FFFFFF"/>
                 </a:solidFill>
@@ -3275,8 +3275,8 @@
         </p:nvSpPr>
         <p:spPr>
           <a:xfrm>
-            <a:off x="777240" y="2377440"/>
-            <a:ext cx="5943600" cy="411480"/>
+            <a:off x="548640" y="2011680"/>
+            <a:ext cx="6400800" cy="736092"/>
           </a:xfrm>
           <a:prstGeom prst="rect">
             <a:avLst/>
@@ -3284,13 +3284,13 @@
           <a:noFill/>
         </p:spPr>
         <p:txBody>
-          <a:bodyPr wrap="square">
+          <a:bodyPr wrap="square" tIns="25400" bIns="0" lIns="0">
             <a:spAutoFit/>
           </a:bodyPr>
           <a:lstStyle/>
           <a:p>
             <a:pPr>
-              <a:defRPr sz="1000">
+              <a:defRPr sz="800">
                 <a:solidFill>
                   <a:srgbClr val="CCCCCC"/>
                 </a:solidFill>
@@ -3298,7 +3298,7 @@
               </a:defRPr>
             </a:pPr>
             <a:r>
-              <a:t>Sending the JSON files to Amazon Elastic File System (Amazon EFS) and configuring an AWS Lambda function with an Amazon EFS event source: While this option uses Amazon EFS for file storage, it does not address the requirement to process the files as soon as they arrive. Additionally, using an EFS event source would require the Lambda function to wait for files to be written to the EFS, rather than triggering the function immediately upon file upload.</a:t>
+              <a:t>Sending the JSON files to Amazon Elastic File System (Amazon EFS) and configuring an AWS Lambda function with ...</a:t>
             </a:r>
           </a:p>
         </p:txBody>
@@ -3311,8 +3311,8 @@
         </p:nvSpPr>
         <p:spPr>
           <a:xfrm>
-            <a:off x="365760" y="2834640"/>
-            <a:ext cx="274320" cy="274320"/>
+            <a:off x="274320" y="2811780"/>
+            <a:ext cx="201168" cy="201168"/>
           </a:xfrm>
           <a:prstGeom prst="ellipse">
             <a:avLst/>
@@ -3343,7 +3343,7 @@
           <a:lstStyle/>
           <a:p>
             <a:pPr algn="ctr">
-              <a:defRPr sz="900" b="1">
+              <a:defRPr sz="700" b="1">
                 <a:solidFill>
                   <a:srgbClr val="FFFFFF"/>
                 </a:solidFill>
@@ -3363,8 +3363,8 @@
         </p:nvSpPr>
         <p:spPr>
           <a:xfrm>
-            <a:off x="777240" y="2834640"/>
-            <a:ext cx="5943600" cy="411480"/>
+            <a:off x="548640" y="2766060"/>
+            <a:ext cx="6400800" cy="736092"/>
           </a:xfrm>
           <a:prstGeom prst="rect">
             <a:avLst/>
@@ -3372,13 +3372,13 @@
           <a:noFill/>
         </p:spPr>
         <p:txBody>
-          <a:bodyPr wrap="square">
+          <a:bodyPr wrap="square" tIns="25400" bIns="0" lIns="0">
             <a:spAutoFit/>
           </a:bodyPr>
           <a:lstStyle/>
           <a:p>
             <a:pPr>
-              <a:defRPr sz="1000">
+              <a:defRPr sz="800">
                 <a:solidFill>
                   <a:srgbClr val="CCCCCC"/>
                 </a:solidFill>
@@ -3386,7 +3386,7 @@
               </a:defRPr>
             </a:pPr>
             <a:r>
-              <a:t>Sending the JSON files to Amazon Elastic File System (Amazon EFS) and scheduling an AWS Lambda function to process the files once each hour: This option does not meet the requirement to process the files as soon as they arrive. Additionally, scheduling the Lambda function to run once each hour may result in delays in processing the files, especially during periods when no files are sent for days.</a:t>
+              <a:t>Sending the JSON files to Amazon Elastic File System (Amazon EFS) and scheduling an AWS Lambda function to pro...</a:t>
             </a:r>
           </a:p>
         </p:txBody>
@@ -3399,8 +3399,8 @@
         </p:nvSpPr>
         <p:spPr>
           <a:xfrm>
-            <a:off x="365760" y="3291840"/>
-            <a:ext cx="274320" cy="274320"/>
+            <a:off x="274320" y="3566160"/>
+            <a:ext cx="201168" cy="201168"/>
           </a:xfrm>
           <a:prstGeom prst="ellipse">
             <a:avLst/>
@@ -3431,7 +3431,7 @@
           <a:lstStyle/>
           <a:p>
             <a:pPr algn="ctr">
-              <a:defRPr sz="900" b="1">
+              <a:defRPr sz="700" b="1">
                 <a:solidFill>
                   <a:srgbClr val="FFFFFF"/>
                 </a:solidFill>
@@ -3451,8 +3451,8 @@
         </p:nvSpPr>
         <p:spPr>
           <a:xfrm>
-            <a:off x="777240" y="3291840"/>
-            <a:ext cx="5943600" cy="411480"/>
+            <a:off x="548640" y="3520440"/>
+            <a:ext cx="6400800" cy="736092"/>
           </a:xfrm>
           <a:prstGeom prst="rect">
             <a:avLst/>
@@ -3460,13 +3460,13 @@
           <a:noFill/>
         </p:spPr>
         <p:txBody>
-          <a:bodyPr wrap="square">
+          <a:bodyPr wrap="square" tIns="25400" bIns="0" lIns="0">
             <a:spAutoFit/>
           </a:bodyPr>
           <a:lstStyle/>
           <a:p>
             <a:pPr>
-              <a:defRPr sz="1000">
+              <a:defRPr sz="800">
                 <a:solidFill>
                   <a:srgbClr val="CCCCCC"/>
                 </a:solidFill>
@@ -3474,7 +3474,7 @@
               </a:defRPr>
             </a:pPr>
             <a:r>
-              <a:t>Send the JSON files to an Amazon S3 bucket. Configure an AWS Lambda function with an S3 event source to process the S3 objects.</a:t>
+              <a:t>Send the JSON files to an Amazon S3 bucket...</a:t>
             </a:r>
           </a:p>
         </p:txBody>
@@ -3487,8 +3487,8 @@
         </p:nvSpPr>
         <p:spPr>
           <a:xfrm>
-            <a:off x="365760" y="3749039"/>
-            <a:ext cx="274320" cy="274320"/>
+            <a:off x="274320" y="4320540"/>
+            <a:ext cx="201168" cy="201168"/>
           </a:xfrm>
           <a:prstGeom prst="ellipse">
             <a:avLst/>
@@ -3519,7 +3519,7 @@
           <a:lstStyle/>
           <a:p>
             <a:pPr algn="ctr">
-              <a:defRPr sz="900" b="1">
+              <a:defRPr sz="700" b="1">
                 <a:solidFill>
                   <a:srgbClr val="FFFFFF"/>
                 </a:solidFill>
@@ -3539,8 +3539,8 @@
         </p:nvSpPr>
         <p:spPr>
           <a:xfrm>
-            <a:off x="777240" y="3749039"/>
-            <a:ext cx="5943600" cy="411480"/>
+            <a:off x="548640" y="4274820"/>
+            <a:ext cx="6400800" cy="736092"/>
           </a:xfrm>
           <a:prstGeom prst="rect">
             <a:avLst/>
@@ -3548,13 +3548,13 @@
           <a:noFill/>
         </p:spPr>
         <p:txBody>
-          <a:bodyPr wrap="square">
+          <a:bodyPr wrap="square" tIns="25400" bIns="0" lIns="0">
             <a:spAutoFit/>
           </a:bodyPr>
           <a:lstStyle/>
           <a:p>
             <a:pPr>
-              <a:defRPr sz="1000">
+              <a:defRPr sz="800">
                 <a:solidFill>
                   <a:srgbClr val="CCCCCC"/>
                 </a:solidFill>
@@ -3562,7 +3562,7 @@
               </a:defRPr>
             </a:pPr>
             <a:r>
-              <a:t>Sending the JSON files to an Amazon S3 bucket and scheduling an AWS Lambda function to process the S3 objects once each hour: Similar to option B, this solution does not meet the requirement to process the files as soon as they arrive. Additionally, scheduling the Lambda function to run once each hour may introduce delays in processing the files, especially during periods when no files are sent for days.</a:t>
+              <a:t>Sending the JSON files to an Amazon S3 bucket and scheduling an AWS Lambda function to process the S3 objects ...</a:t>
             </a:r>
           </a:p>
         </p:txBody>
@@ -3844,8 +3844,8 @@
         </p:blipFill>
         <p:spPr>
           <a:xfrm>
-            <a:off x="182880" y="914400"/>
-            <a:ext cx="5280660" cy="3840480"/>
+            <a:off x="182880" y="1767857"/>
+            <a:ext cx="5303520" cy="2133565"/>
           </a:xfrm>
           <a:prstGeom prst="rect">
             <a:avLst/>
@@ -3980,9 +3980,9 @@
           <a:p>
             <a:pPr>
               <a:spcAft>
-                <a:spcPts val="600"/>
+                <a:spcPts val="400"/>
               </a:spcAft>
-              <a:defRPr sz="900">
+              <a:defRPr sz="800">
                 <a:solidFill>
                   <a:srgbClr val="212121"/>
                 </a:solidFill>
@@ -3990,15 +3990,15 @@
               </a:defRPr>
             </a:pPr>
             <a:r>
-              <a:t>• Sending the JSON files to Amazon Elastic File System (Amazon EFS) and configuring an AWS Lambda function with an Amazon EFS event source: While this option uses Amazon EFS for file storage, it does not address the requirement to process the files as soon as they arrive.</a:t>
+              <a:t>• Sending the JSON files to Amazon Elastic File System (Amazon EFS) and configuring an AWS Lambda function with an Amazon EFS event source: While this option uses Amazon EFS for file storage</a:t>
             </a:r>
           </a:p>
           <a:p>
             <a:pPr>
               <a:spcAft>
-                <a:spcPts val="600"/>
+                <a:spcPts val="400"/>
               </a:spcAft>
-              <a:defRPr sz="900">
+              <a:defRPr sz="800">
                 <a:solidFill>
                   <a:srgbClr val="212121"/>
                 </a:solidFill>
@@ -4006,7 +4006,39 @@
               </a:defRPr>
             </a:pPr>
             <a:r>
-              <a:t>• Additionally, using an EFS event source would require the Lambda function to wait for files to be written to the EFS, rather than triggering the function immediately upon file upload.</a:t>
+              <a:t>• Not address the requirement to process the files as soon as they arrive</a:t>
+            </a:r>
+          </a:p>
+          <a:p>
+            <a:pPr>
+              <a:spcAft>
+                <a:spcPts val="400"/>
+              </a:spcAft>
+              <a:defRPr sz="800">
+                <a:solidFill>
+                  <a:srgbClr val="212121"/>
+                </a:solidFill>
+                <a:latin typeface="Segoe UI"/>
+              </a:defRPr>
+            </a:pPr>
+            <a:r>
+              <a:t>• Additionally, using an EFS event source would require the Lambda function to wait for files to be written to the EFS</a:t>
+            </a:r>
+          </a:p>
+          <a:p>
+            <a:pPr>
+              <a:spcAft>
+                <a:spcPts val="400"/>
+              </a:spcAft>
+              <a:defRPr sz="800">
+                <a:solidFill>
+                  <a:srgbClr val="212121"/>
+                </a:solidFill>
+                <a:latin typeface="Segoe UI"/>
+              </a:defRPr>
+            </a:pPr>
+            <a:r>
+              <a:t>• Triggering the function immediately upon file upload</a:t>
             </a:r>
           </a:p>
         </p:txBody>
@@ -4185,8 +4217,8 @@
         </p:blipFill>
         <p:spPr>
           <a:xfrm>
-            <a:off x="182880" y="914400"/>
-            <a:ext cx="5280660" cy="3840480"/>
+            <a:off x="182880" y="1090099"/>
+            <a:ext cx="5303520" cy="3489081"/>
           </a:xfrm>
           <a:prstGeom prst="rect">
             <a:avLst/>
@@ -4321,9 +4353,9 @@
           <a:p>
             <a:pPr>
               <a:spcAft>
-                <a:spcPts val="600"/>
+                <a:spcPts val="400"/>
               </a:spcAft>
-              <a:defRPr sz="900">
+              <a:defRPr sz="800">
                 <a:solidFill>
                   <a:srgbClr val="212121"/>
                 </a:solidFill>
@@ -4331,15 +4363,15 @@
               </a:defRPr>
             </a:pPr>
             <a:r>
-              <a:t>• Sending the JSON files to Amazon Elastic File System (Amazon EFS) and scheduling an AWS Lambda function to process the files once each hour: This option does not meet the requirement to process the files as soon as they arrive.</a:t>
+              <a:t>• Sending the JSON files to Amazon Elastic File System (Amazon EFS) and scheduling an AWS Lambda function to process the files once each hour: This option does not meet the requirement to process the files as soon as they arrive</a:t>
             </a:r>
           </a:p>
           <a:p>
             <a:pPr>
               <a:spcAft>
-                <a:spcPts val="600"/>
+                <a:spcPts val="400"/>
               </a:spcAft>
-              <a:defRPr sz="900">
+              <a:defRPr sz="800">
                 <a:solidFill>
                   <a:srgbClr val="212121"/>
                 </a:solidFill>
@@ -4347,7 +4379,7 @@
               </a:defRPr>
             </a:pPr>
             <a:r>
-              <a:t>• Additionally, scheduling the Lambda function to run once each hour may result in delays in processing the files, especially during periods when no files are sent for days.</a:t>
+              <a:t>• Additionally, scheduling the Lambda function to run once each hour may result in delays in processing the files, especially during periods when no files are sent for days</a:t>
             </a:r>
           </a:p>
         </p:txBody>
@@ -4526,8 +4558,8 @@
         </p:blipFill>
         <p:spPr>
           <a:xfrm>
-            <a:off x="182880" y="914400"/>
-            <a:ext cx="5280660" cy="3840480"/>
+            <a:off x="182880" y="1707457"/>
+            <a:ext cx="5303520" cy="2254365"/>
           </a:xfrm>
           <a:prstGeom prst="rect">
             <a:avLst/>
@@ -4662,9 +4694,9 @@
           <a:p>
             <a:pPr>
               <a:spcAft>
-                <a:spcPts val="600"/>
+                <a:spcPts val="400"/>
               </a:spcAft>
-              <a:defRPr sz="900">
+              <a:defRPr sz="800">
                 <a:solidFill>
                   <a:srgbClr val="212121"/>
                 </a:solidFill>
@@ -4672,15 +4704,15 @@
               </a:defRPr>
             </a:pPr>
             <a:r>
-              <a:t>• Send the JSON files to an Amazon S3 bucket.</a:t>
+              <a:t>• Send the JSON files to an Amazon S3 bucket</a:t>
             </a:r>
           </a:p>
           <a:p>
             <a:pPr>
               <a:spcAft>
-                <a:spcPts val="600"/>
+                <a:spcPts val="400"/>
               </a:spcAft>
-              <a:defRPr sz="900">
+              <a:defRPr sz="800">
                 <a:solidFill>
                   <a:srgbClr val="212121"/>
                 </a:solidFill>
@@ -4688,15 +4720,15 @@
               </a:defRPr>
             </a:pPr>
             <a:r>
-              <a:t>• Configure an AWS Lambda function with an S3 event source to process the S3 objects.</a:t>
+              <a:t>• Configure an AWS Lambda function with an S3 event source to process the S3 objects</a:t>
             </a:r>
           </a:p>
           <a:p>
             <a:pPr>
               <a:spcAft>
-                <a:spcPts val="600"/>
+                <a:spcPts val="400"/>
               </a:spcAft>
-              <a:defRPr sz="900">
+              <a:defRPr sz="800">
                 <a:solidFill>
                   <a:srgbClr val="212121"/>
                 </a:solidFill>
@@ -4704,15 +4736,15 @@
               </a:defRPr>
             </a:pPr>
             <a:r>
-              <a:t>• This solution meets the requirements because it leverages Amazon S3, a highly durable object storage service, to store the JSON files.</a:t>
+              <a:t>• This solution meets the requirements because it leverages Amazon S3</a:t>
             </a:r>
           </a:p>
           <a:p>
             <a:pPr>
               <a:spcAft>
-                <a:spcPts val="600"/>
+                <a:spcPts val="400"/>
               </a:spcAft>
-              <a:defRPr sz="900">
+              <a:defRPr sz="800">
                 <a:solidFill>
                   <a:srgbClr val="212121"/>
                 </a:solidFill>
@@ -4720,15 +4752,15 @@
               </a:defRPr>
             </a:pPr>
             <a:r>
-              <a:t>• AWS Lambda can be configured with an S3 event source, allowing it to process the files as soon as they are uploaded to the S3 bucket.</a:t>
+              <a:t>• A highly durable object storage service</a:t>
             </a:r>
           </a:p>
           <a:p>
             <a:pPr>
               <a:spcAft>
-                <a:spcPts val="600"/>
+                <a:spcPts val="400"/>
               </a:spcAft>
-              <a:defRPr sz="900">
+              <a:defRPr sz="800">
                 <a:solidFill>
                   <a:srgbClr val="212121"/>
                 </a:solidFill>
@@ -4736,7 +4768,55 @@
               </a:defRPr>
             </a:pPr>
             <a:r>
-              <a:t>• This ensures that the files are processed promptly upon arrival, even if there are days when no files are sent.</a:t>
+              <a:t>• To store the JSON files</a:t>
+            </a:r>
+          </a:p>
+          <a:p>
+            <a:pPr>
+              <a:spcAft>
+                <a:spcPts val="400"/>
+              </a:spcAft>
+              <a:defRPr sz="800">
+                <a:solidFill>
+                  <a:srgbClr val="212121"/>
+                </a:solidFill>
+                <a:latin typeface="Segoe UI"/>
+              </a:defRPr>
+            </a:pPr>
+            <a:r>
+              <a:t>• AWS Lambda can be configured with an S3 event source</a:t>
+            </a:r>
+          </a:p>
+          <a:p>
+            <a:pPr>
+              <a:spcAft>
+                <a:spcPts val="400"/>
+              </a:spcAft>
+              <a:defRPr sz="800">
+                <a:solidFill>
+                  <a:srgbClr val="212121"/>
+                </a:solidFill>
+                <a:latin typeface="Segoe UI"/>
+              </a:defRPr>
+            </a:pPr>
+            <a:r>
+              <a:t>• It to process the files as soon as they are uploaded to the S3 bucket</a:t>
+            </a:r>
+          </a:p>
+          <a:p>
+            <a:pPr>
+              <a:spcAft>
+                <a:spcPts val="400"/>
+              </a:spcAft>
+              <a:defRPr sz="800">
+                <a:solidFill>
+                  <a:srgbClr val="212121"/>
+                </a:solidFill>
+                <a:latin typeface="Segoe UI"/>
+              </a:defRPr>
+            </a:pPr>
+            <a:r>
+              <a:t>• This ensures that the files are processed promptly upon arrival</a:t>
             </a:r>
           </a:p>
         </p:txBody>
@@ -4915,8 +4995,8 @@
         </p:blipFill>
         <p:spPr>
           <a:xfrm>
-            <a:off x="182880" y="914400"/>
-            <a:ext cx="5280660" cy="3840480"/>
+            <a:off x="182880" y="1142147"/>
+            <a:ext cx="5303520" cy="3384985"/>
           </a:xfrm>
           <a:prstGeom prst="rect">
             <a:avLst/>
@@ -5051,9 +5131,9 @@
           <a:p>
             <a:pPr>
               <a:spcAft>
-                <a:spcPts val="600"/>
+                <a:spcPts val="400"/>
               </a:spcAft>
-              <a:defRPr sz="900">
+              <a:defRPr sz="800">
                 <a:solidFill>
                   <a:srgbClr val="212121"/>
                 </a:solidFill>
@@ -5061,15 +5141,15 @@
               </a:defRPr>
             </a:pPr>
             <a:r>
-              <a:t>• Sending the JSON files to an Amazon S3 bucket and scheduling an AWS Lambda function to process the S3 objects once each hour: Similar to option B, this solution does not meet the requirement to process the files as soon as they arrive.</a:t>
+              <a:t>• Sending the JSON files to an Amazon S3 bucket and scheduling an AWS Lambda function to process the S3 objects once each hour: Similar to option B</a:t>
             </a:r>
           </a:p>
           <a:p>
             <a:pPr>
               <a:spcAft>
-                <a:spcPts val="600"/>
+                <a:spcPts val="400"/>
               </a:spcAft>
-              <a:defRPr sz="900">
+              <a:defRPr sz="800">
                 <a:solidFill>
                   <a:srgbClr val="212121"/>
                 </a:solidFill>
@@ -5077,7 +5157,23 @@
               </a:defRPr>
             </a:pPr>
             <a:r>
-              <a:t>• Additionally, scheduling the Lambda function to run once each hour may introduce delays in processing the files, especially during periods when no files are sent for days.</a:t>
+              <a:t>• This solution does not meet the requirement to process the files as soon as they arrive</a:t>
+            </a:r>
+          </a:p>
+          <a:p>
+            <a:pPr>
+              <a:spcAft>
+                <a:spcPts val="400"/>
+              </a:spcAft>
+              <a:defRPr sz="800">
+                <a:solidFill>
+                  <a:srgbClr val="212121"/>
+                </a:solidFill>
+                <a:latin typeface="Segoe UI"/>
+              </a:defRPr>
+            </a:pPr>
+            <a:r>
+              <a:t>• Additionally, scheduling the Lambda function to run once each hour may introduce delays in processing the files, especially during periods when no files are sent for days</a:t>
             </a:r>
           </a:p>
         </p:txBody>

--- a/session1/exam-strategy/q2/q2_exam_strategy.pptx
+++ b/session1/exam-strategy/q2/q2_exam_strategy.pptx
@@ -3187,8 +3187,8 @@
         </p:nvSpPr>
         <p:spPr>
           <a:xfrm>
-            <a:off x="274320" y="640080"/>
-            <a:ext cx="6583680" cy="1280160"/>
+            <a:off x="274320" y="685800"/>
+            <a:ext cx="6400800" cy="1645920"/>
           </a:xfrm>
           <a:prstGeom prst="rect">
             <a:avLst/>
@@ -3196,13 +3196,13 @@
           <a:noFill/>
         </p:spPr>
         <p:txBody>
-          <a:bodyPr wrap="square" tIns="0" bIns="0">
+          <a:bodyPr wrap="square">
             <a:spAutoFit/>
           </a:bodyPr>
           <a:lstStyle/>
           <a:p>
             <a:pPr>
-              <a:defRPr sz="900">
+              <a:defRPr sz="1100">
                 <a:solidFill>
                   <a:srgbClr val="FFFFFF"/>
                 </a:solidFill>
@@ -3223,8 +3223,8 @@
         </p:nvSpPr>
         <p:spPr>
           <a:xfrm>
-            <a:off x="274320" y="2057400"/>
-            <a:ext cx="201168" cy="201168"/>
+            <a:off x="365760" y="2377440"/>
+            <a:ext cx="274320" cy="274320"/>
           </a:xfrm>
           <a:prstGeom prst="ellipse">
             <a:avLst/>
@@ -3255,7 +3255,7 @@
           <a:lstStyle/>
           <a:p>
             <a:pPr algn="ctr">
-              <a:defRPr sz="700" b="1">
+              <a:defRPr sz="900" b="1">
                 <a:solidFill>
                   <a:srgbClr val="FFFFFF"/>
                 </a:solidFill>
@@ -3275,8 +3275,8 @@
         </p:nvSpPr>
         <p:spPr>
           <a:xfrm>
-            <a:off x="548640" y="2011680"/>
-            <a:ext cx="6400800" cy="736092"/>
+            <a:off x="777240" y="2377440"/>
+            <a:ext cx="5943600" cy="411480"/>
           </a:xfrm>
           <a:prstGeom prst="rect">
             <a:avLst/>
@@ -3284,13 +3284,13 @@
           <a:noFill/>
         </p:spPr>
         <p:txBody>
-          <a:bodyPr wrap="square" tIns="25400" bIns="0" lIns="0">
+          <a:bodyPr wrap="square">
             <a:spAutoFit/>
           </a:bodyPr>
           <a:lstStyle/>
           <a:p>
             <a:pPr>
-              <a:defRPr sz="800">
+              <a:defRPr sz="1000">
                 <a:solidFill>
                   <a:srgbClr val="CCCCCC"/>
                 </a:solidFill>
@@ -3298,7 +3298,7 @@
               </a:defRPr>
             </a:pPr>
             <a:r>
-              <a:t>Sending the JSON files to Amazon Elastic File System (Amazon EFS) and configuring an AWS Lambda function with ...</a:t>
+              <a:t>Sending the JSON files to Amazon Elastic File System (Amazon EFS) and configuring an AWS Lambda function with an Amazon EFS event source: While this option uses Amazon EFS for file storage, it does not address the requirement to process the files as soon as they arrive. Additionally, using an EFS event source would require the Lambda function to wait for files to be written to the EFS, rather than triggering the function immediately upon file upload.</a:t>
             </a:r>
           </a:p>
         </p:txBody>
@@ -3311,8 +3311,8 @@
         </p:nvSpPr>
         <p:spPr>
           <a:xfrm>
-            <a:off x="274320" y="2811780"/>
-            <a:ext cx="201168" cy="201168"/>
+            <a:off x="365760" y="2834640"/>
+            <a:ext cx="274320" cy="274320"/>
           </a:xfrm>
           <a:prstGeom prst="ellipse">
             <a:avLst/>
@@ -3343,7 +3343,7 @@
           <a:lstStyle/>
           <a:p>
             <a:pPr algn="ctr">
-              <a:defRPr sz="700" b="1">
+              <a:defRPr sz="900" b="1">
                 <a:solidFill>
                   <a:srgbClr val="FFFFFF"/>
                 </a:solidFill>
@@ -3363,8 +3363,8 @@
         </p:nvSpPr>
         <p:spPr>
           <a:xfrm>
-            <a:off x="548640" y="2766060"/>
-            <a:ext cx="6400800" cy="736092"/>
+            <a:off x="777240" y="2834640"/>
+            <a:ext cx="5943600" cy="411480"/>
           </a:xfrm>
           <a:prstGeom prst="rect">
             <a:avLst/>
@@ -3372,13 +3372,13 @@
           <a:noFill/>
         </p:spPr>
         <p:txBody>
-          <a:bodyPr wrap="square" tIns="25400" bIns="0" lIns="0">
+          <a:bodyPr wrap="square">
             <a:spAutoFit/>
           </a:bodyPr>
           <a:lstStyle/>
           <a:p>
             <a:pPr>
-              <a:defRPr sz="800">
+              <a:defRPr sz="1000">
                 <a:solidFill>
                   <a:srgbClr val="CCCCCC"/>
                 </a:solidFill>
@@ -3386,7 +3386,7 @@
               </a:defRPr>
             </a:pPr>
             <a:r>
-              <a:t>Sending the JSON files to Amazon Elastic File System (Amazon EFS) and scheduling an AWS Lambda function to pro...</a:t>
+              <a:t>Sending the JSON files to Amazon Elastic File System (Amazon EFS) and scheduling an AWS Lambda function to process the files once each hour: This option does not meet the requirement to process the files as soon as they arrive. Additionally, scheduling the Lambda function to run once each hour may result in delays in processing the files, especially during periods when no files are sent for days.</a:t>
             </a:r>
           </a:p>
         </p:txBody>
@@ -3399,8 +3399,8 @@
         </p:nvSpPr>
         <p:spPr>
           <a:xfrm>
-            <a:off x="274320" y="3566160"/>
-            <a:ext cx="201168" cy="201168"/>
+            <a:off x="365760" y="3291840"/>
+            <a:ext cx="274320" cy="274320"/>
           </a:xfrm>
           <a:prstGeom prst="ellipse">
             <a:avLst/>
@@ -3431,7 +3431,7 @@
           <a:lstStyle/>
           <a:p>
             <a:pPr algn="ctr">
-              <a:defRPr sz="700" b="1">
+              <a:defRPr sz="900" b="1">
                 <a:solidFill>
                   <a:srgbClr val="FFFFFF"/>
                 </a:solidFill>
@@ -3451,8 +3451,8 @@
         </p:nvSpPr>
         <p:spPr>
           <a:xfrm>
-            <a:off x="548640" y="3520440"/>
-            <a:ext cx="6400800" cy="736092"/>
+            <a:off x="777240" y="3291840"/>
+            <a:ext cx="5943600" cy="411480"/>
           </a:xfrm>
           <a:prstGeom prst="rect">
             <a:avLst/>
@@ -3460,13 +3460,13 @@
           <a:noFill/>
         </p:spPr>
         <p:txBody>
-          <a:bodyPr wrap="square" tIns="25400" bIns="0" lIns="0">
+          <a:bodyPr wrap="square">
             <a:spAutoFit/>
           </a:bodyPr>
           <a:lstStyle/>
           <a:p>
             <a:pPr>
-              <a:defRPr sz="800">
+              <a:defRPr sz="1000">
                 <a:solidFill>
                   <a:srgbClr val="CCCCCC"/>
                 </a:solidFill>
@@ -3474,7 +3474,7 @@
               </a:defRPr>
             </a:pPr>
             <a:r>
-              <a:t>Send the JSON files to an Amazon S3 bucket...</a:t>
+              <a:t>Send the JSON files to an Amazon S3 bucket. Configure an AWS Lambda function with an S3 event source to process the S3 objects.</a:t>
             </a:r>
           </a:p>
         </p:txBody>
@@ -3487,8 +3487,8 @@
         </p:nvSpPr>
         <p:spPr>
           <a:xfrm>
-            <a:off x="274320" y="4320540"/>
-            <a:ext cx="201168" cy="201168"/>
+            <a:off x="365760" y="3749039"/>
+            <a:ext cx="274320" cy="274320"/>
           </a:xfrm>
           <a:prstGeom prst="ellipse">
             <a:avLst/>
@@ -3519,7 +3519,7 @@
           <a:lstStyle/>
           <a:p>
             <a:pPr algn="ctr">
-              <a:defRPr sz="700" b="1">
+              <a:defRPr sz="900" b="1">
                 <a:solidFill>
                   <a:srgbClr val="FFFFFF"/>
                 </a:solidFill>
@@ -3539,8 +3539,8 @@
         </p:nvSpPr>
         <p:spPr>
           <a:xfrm>
-            <a:off x="548640" y="4274820"/>
-            <a:ext cx="6400800" cy="736092"/>
+            <a:off x="777240" y="3749039"/>
+            <a:ext cx="5943600" cy="411480"/>
           </a:xfrm>
           <a:prstGeom prst="rect">
             <a:avLst/>
@@ -3548,13 +3548,13 @@
           <a:noFill/>
         </p:spPr>
         <p:txBody>
-          <a:bodyPr wrap="square" tIns="25400" bIns="0" lIns="0">
+          <a:bodyPr wrap="square">
             <a:spAutoFit/>
           </a:bodyPr>
           <a:lstStyle/>
           <a:p>
             <a:pPr>
-              <a:defRPr sz="800">
+              <a:defRPr sz="1000">
                 <a:solidFill>
                   <a:srgbClr val="CCCCCC"/>
                 </a:solidFill>
@@ -3562,7 +3562,7 @@
               </a:defRPr>
             </a:pPr>
             <a:r>
-              <a:t>Sending the JSON files to an Amazon S3 bucket and scheduling an AWS Lambda function to process the S3 objects ...</a:t>
+              <a:t>Sending the JSON files to an Amazon S3 bucket and scheduling an AWS Lambda function to process the S3 objects once each hour: Similar to option B, this solution does not meet the requirement to process the files as soon as they arrive. Additionally, scheduling the Lambda function to run once each hour may introduce delays in processing the files, especially during periods when no files are sent for days.</a:t>
             </a:r>
           </a:p>
         </p:txBody>
@@ -3844,8 +3844,8 @@
         </p:blipFill>
         <p:spPr>
           <a:xfrm>
-            <a:off x="182880" y="1767857"/>
-            <a:ext cx="5303520" cy="2133565"/>
+            <a:off x="182880" y="1942358"/>
+            <a:ext cx="5303520" cy="1784562"/>
           </a:xfrm>
           <a:prstGeom prst="rect">
             <a:avLst/>
@@ -3980,9 +3980,9 @@
           <a:p>
             <a:pPr>
               <a:spcAft>
-                <a:spcPts val="400"/>
+                <a:spcPts val="600"/>
               </a:spcAft>
-              <a:defRPr sz="800">
+              <a:defRPr sz="900">
                 <a:solidFill>
                   <a:srgbClr val="212121"/>
                 </a:solidFill>
@@ -3990,15 +3990,15 @@
               </a:defRPr>
             </a:pPr>
             <a:r>
-              <a:t>• Sending the JSON files to Amazon Elastic File System (Amazon EFS) and configuring an AWS Lambda function with an Amazon EFS event source: While this option uses Amazon EFS for file storage</a:t>
+              <a:t>• Sending the JSON files to Amazon Elastic File System (Amazon EFS) and configuring an AWS Lambda function with an Amazon EFS event source: While this option uses Amazon EFS for file storage, it does not address the requirement to process the files as soon as they arrive.</a:t>
             </a:r>
           </a:p>
           <a:p>
             <a:pPr>
               <a:spcAft>
-                <a:spcPts val="400"/>
+                <a:spcPts val="600"/>
               </a:spcAft>
-              <a:defRPr sz="800">
+              <a:defRPr sz="900">
                 <a:solidFill>
                   <a:srgbClr val="212121"/>
                 </a:solidFill>
@@ -4006,39 +4006,7 @@
               </a:defRPr>
             </a:pPr>
             <a:r>
-              <a:t>• Not address the requirement to process the files as soon as they arrive</a:t>
-            </a:r>
-          </a:p>
-          <a:p>
-            <a:pPr>
-              <a:spcAft>
-                <a:spcPts val="400"/>
-              </a:spcAft>
-              <a:defRPr sz="800">
-                <a:solidFill>
-                  <a:srgbClr val="212121"/>
-                </a:solidFill>
-                <a:latin typeface="Segoe UI"/>
-              </a:defRPr>
-            </a:pPr>
-            <a:r>
-              <a:t>• Additionally, using an EFS event source would require the Lambda function to wait for files to be written to the EFS</a:t>
-            </a:r>
-          </a:p>
-          <a:p>
-            <a:pPr>
-              <a:spcAft>
-                <a:spcPts val="400"/>
-              </a:spcAft>
-              <a:defRPr sz="800">
-                <a:solidFill>
-                  <a:srgbClr val="212121"/>
-                </a:solidFill>
-                <a:latin typeface="Segoe UI"/>
-              </a:defRPr>
-            </a:pPr>
-            <a:r>
-              <a:t>• Triggering the function immediately upon file upload</a:t>
+              <a:t>• Additionally, using an EFS event source would require the Lambda function to wait for files to be written to the EFS, rather than triggering the function immediately upon file upload.</a:t>
             </a:r>
           </a:p>
         </p:txBody>
@@ -4217,8 +4185,8 @@
         </p:blipFill>
         <p:spPr>
           <a:xfrm>
-            <a:off x="182880" y="1090099"/>
-            <a:ext cx="5303520" cy="3489081"/>
+            <a:off x="182880" y="981488"/>
+            <a:ext cx="5303520" cy="3706302"/>
           </a:xfrm>
           <a:prstGeom prst="rect">
             <a:avLst/>
@@ -4353,9 +4321,9 @@
           <a:p>
             <a:pPr>
               <a:spcAft>
-                <a:spcPts val="400"/>
+                <a:spcPts val="600"/>
               </a:spcAft>
-              <a:defRPr sz="800">
+              <a:defRPr sz="900">
                 <a:solidFill>
                   <a:srgbClr val="212121"/>
                 </a:solidFill>
@@ -4363,15 +4331,15 @@
               </a:defRPr>
             </a:pPr>
             <a:r>
-              <a:t>• Sending the JSON files to Amazon Elastic File System (Amazon EFS) and scheduling an AWS Lambda function to process the files once each hour: This option does not meet the requirement to process the files as soon as they arrive</a:t>
+              <a:t>• Sending the JSON files to Amazon Elastic File System (Amazon EFS) and scheduling an AWS Lambda function to process the files once each hour: This option does not meet the requirement to process the files as soon as they arrive.</a:t>
             </a:r>
           </a:p>
           <a:p>
             <a:pPr>
               <a:spcAft>
-                <a:spcPts val="400"/>
+                <a:spcPts val="600"/>
               </a:spcAft>
-              <a:defRPr sz="800">
+              <a:defRPr sz="900">
                 <a:solidFill>
                   <a:srgbClr val="212121"/>
                 </a:solidFill>
@@ -4379,7 +4347,7 @@
               </a:defRPr>
             </a:pPr>
             <a:r>
-              <a:t>• Additionally, scheduling the Lambda function to run once each hour may result in delays in processing the files, especially during periods when no files are sent for days</a:t>
+              <a:t>• Additionally, scheduling the Lambda function to run once each hour may result in delays in processing the files, especially during periods when no files are sent for days.</a:t>
             </a:r>
           </a:p>
         </p:txBody>
@@ -4558,8 +4526,8 @@
         </p:blipFill>
         <p:spPr>
           <a:xfrm>
-            <a:off x="182880" y="1707457"/>
-            <a:ext cx="5303520" cy="2254365"/>
+            <a:off x="182880" y="2035479"/>
+            <a:ext cx="5303520" cy="1598321"/>
           </a:xfrm>
           <a:prstGeom prst="rect">
             <a:avLst/>
@@ -4694,9 +4662,9 @@
           <a:p>
             <a:pPr>
               <a:spcAft>
-                <a:spcPts val="400"/>
+                <a:spcPts val="600"/>
               </a:spcAft>
-              <a:defRPr sz="800">
+              <a:defRPr sz="900">
                 <a:solidFill>
                   <a:srgbClr val="212121"/>
                 </a:solidFill>
@@ -4704,15 +4672,15 @@
               </a:defRPr>
             </a:pPr>
             <a:r>
-              <a:t>• Send the JSON files to an Amazon S3 bucket</a:t>
+              <a:t>• Send the JSON files to an Amazon S3 bucket.</a:t>
             </a:r>
           </a:p>
           <a:p>
             <a:pPr>
               <a:spcAft>
-                <a:spcPts val="400"/>
+                <a:spcPts val="600"/>
               </a:spcAft>
-              <a:defRPr sz="800">
+              <a:defRPr sz="900">
                 <a:solidFill>
                   <a:srgbClr val="212121"/>
                 </a:solidFill>
@@ -4720,15 +4688,15 @@
               </a:defRPr>
             </a:pPr>
             <a:r>
-              <a:t>• Configure an AWS Lambda function with an S3 event source to process the S3 objects</a:t>
+              <a:t>• Configure an AWS Lambda function with an S3 event source to process the S3 objects.</a:t>
             </a:r>
           </a:p>
           <a:p>
             <a:pPr>
               <a:spcAft>
-                <a:spcPts val="400"/>
+                <a:spcPts val="600"/>
               </a:spcAft>
-              <a:defRPr sz="800">
+              <a:defRPr sz="900">
                 <a:solidFill>
                   <a:srgbClr val="212121"/>
                 </a:solidFill>
@@ -4736,15 +4704,15 @@
               </a:defRPr>
             </a:pPr>
             <a:r>
-              <a:t>• This solution meets the requirements because it leverages Amazon S3</a:t>
+              <a:t>• This solution meets the requirements because it leverages Amazon S3, a highly durable object storage service, to store the JSON files.</a:t>
             </a:r>
           </a:p>
           <a:p>
             <a:pPr>
               <a:spcAft>
-                <a:spcPts val="400"/>
+                <a:spcPts val="600"/>
               </a:spcAft>
-              <a:defRPr sz="800">
+              <a:defRPr sz="900">
                 <a:solidFill>
                   <a:srgbClr val="212121"/>
                 </a:solidFill>
@@ -4752,15 +4720,15 @@
               </a:defRPr>
             </a:pPr>
             <a:r>
-              <a:t>• A highly durable object storage service</a:t>
+              <a:t>• AWS Lambda can be configured with an S3 event source, allowing it to process the files as soon as they are uploaded to the S3 bucket.</a:t>
             </a:r>
           </a:p>
           <a:p>
             <a:pPr>
               <a:spcAft>
-                <a:spcPts val="400"/>
+                <a:spcPts val="600"/>
               </a:spcAft>
-              <a:defRPr sz="800">
+              <a:defRPr sz="900">
                 <a:solidFill>
                   <a:srgbClr val="212121"/>
                 </a:solidFill>
@@ -4768,55 +4736,7 @@
               </a:defRPr>
             </a:pPr>
             <a:r>
-              <a:t>• To store the JSON files</a:t>
-            </a:r>
-          </a:p>
-          <a:p>
-            <a:pPr>
-              <a:spcAft>
-                <a:spcPts val="400"/>
-              </a:spcAft>
-              <a:defRPr sz="800">
-                <a:solidFill>
-                  <a:srgbClr val="212121"/>
-                </a:solidFill>
-                <a:latin typeface="Segoe UI"/>
-              </a:defRPr>
-            </a:pPr>
-            <a:r>
-              <a:t>• AWS Lambda can be configured with an S3 event source</a:t>
-            </a:r>
-          </a:p>
-          <a:p>
-            <a:pPr>
-              <a:spcAft>
-                <a:spcPts val="400"/>
-              </a:spcAft>
-              <a:defRPr sz="800">
-                <a:solidFill>
-                  <a:srgbClr val="212121"/>
-                </a:solidFill>
-                <a:latin typeface="Segoe UI"/>
-              </a:defRPr>
-            </a:pPr>
-            <a:r>
-              <a:t>• It to process the files as soon as they are uploaded to the S3 bucket</a:t>
-            </a:r>
-          </a:p>
-          <a:p>
-            <a:pPr>
-              <a:spcAft>
-                <a:spcPts val="400"/>
-              </a:spcAft>
-              <a:defRPr sz="800">
-                <a:solidFill>
-                  <a:srgbClr val="212121"/>
-                </a:solidFill>
-                <a:latin typeface="Segoe UI"/>
-              </a:defRPr>
-            </a:pPr>
-            <a:r>
-              <a:t>• This ensures that the files are processed promptly upon arrival</a:t>
+              <a:t>• This ensures that the files are processed promptly upon arrival, even if there are days when no files are sent.</a:t>
             </a:r>
           </a:p>
         </p:txBody>
@@ -4995,8 +4915,8 @@
         </p:blipFill>
         <p:spPr>
           <a:xfrm>
-            <a:off x="182880" y="1142147"/>
-            <a:ext cx="5303520" cy="3384985"/>
+            <a:off x="182880" y="1034573"/>
+            <a:ext cx="5303520" cy="3600132"/>
           </a:xfrm>
           <a:prstGeom prst="rect">
             <a:avLst/>
@@ -5131,9 +5051,9 @@
           <a:p>
             <a:pPr>
               <a:spcAft>
-                <a:spcPts val="400"/>
+                <a:spcPts val="600"/>
               </a:spcAft>
-              <a:defRPr sz="800">
+              <a:defRPr sz="900">
                 <a:solidFill>
                   <a:srgbClr val="212121"/>
                 </a:solidFill>
@@ -5141,15 +5061,15 @@
               </a:defRPr>
             </a:pPr>
             <a:r>
-              <a:t>• Sending the JSON files to an Amazon S3 bucket and scheduling an AWS Lambda function to process the S3 objects once each hour: Similar to option B</a:t>
+              <a:t>• Sending the JSON files to an Amazon S3 bucket and scheduling an AWS Lambda function to process the S3 objects once each hour: Similar to option B, this solution does not meet the requirement to process the files as soon as they arrive.</a:t>
             </a:r>
           </a:p>
           <a:p>
             <a:pPr>
               <a:spcAft>
-                <a:spcPts val="400"/>
+                <a:spcPts val="600"/>
               </a:spcAft>
-              <a:defRPr sz="800">
+              <a:defRPr sz="900">
                 <a:solidFill>
                   <a:srgbClr val="212121"/>
                 </a:solidFill>
@@ -5157,23 +5077,7 @@
               </a:defRPr>
             </a:pPr>
             <a:r>
-              <a:t>• This solution does not meet the requirement to process the files as soon as they arrive</a:t>
-            </a:r>
-          </a:p>
-          <a:p>
-            <a:pPr>
-              <a:spcAft>
-                <a:spcPts val="400"/>
-              </a:spcAft>
-              <a:defRPr sz="800">
-                <a:solidFill>
-                  <a:srgbClr val="212121"/>
-                </a:solidFill>
-                <a:latin typeface="Segoe UI"/>
-              </a:defRPr>
-            </a:pPr>
-            <a:r>
-              <a:t>• Additionally, scheduling the Lambda function to run once each hour may introduce delays in processing the files, especially during periods when no files are sent for days</a:t>
+              <a:t>• Additionally, scheduling the Lambda function to run once each hour may introduce delays in processing the files, especially during periods when no files are sent for days.</a:t>
             </a:r>
           </a:p>
         </p:txBody>
